--- a/Seminar_SOA _ REDIS.pptx
+++ b/Seminar_SOA _ REDIS.pptx
@@ -11686,44 +11686,52 @@
           <a:chExt cx="0" cy="0"/>
         </a:xfrm>
       </p:grpSpPr>
-      <p:graphicFrame>
-        <p:nvGraphicFramePr>
-          <p:cNvPr name="Object 2" id="2"/>
-          <p:cNvGraphicFramePr/>
+      <p:sp>
+        <p:nvSpPr>
+          <p:cNvPr name="Freeform 2" id="2"/>
+          <p:cNvSpPr/>
           <p:nvPr/>
-        </p:nvGraphicFramePr>
-        <p:xfrm>
-          <a:off x="265471" y="1544830"/>
-          <a:ext cx="5657850" cy="3771900"/>
-        </p:xfrm>
-        <a:graphic>
-          <a:graphicData uri="http://schemas.openxmlformats.org/presentationml/2006/ole">
-            <p:oleObj imgW="6781800" imgH="4902200" r:id="rId3" progId="Excel.Sheet.12" name="Worksheet">
-              <p:embed/>
-              <p:pic>
-                <p:nvPicPr>
-                  <p:cNvPr name="" id="0"/>
-                  <p:cNvPicPr/>
-                  <p:nvPr/>
-                </p:nvPicPr>
-                <p:blipFill>
-                  <a:blip r:embed="rId2"/>
-                  <a:stretch>
-                    <a:fillRect/>
-                  </a:stretch>
-                </p:blipFill>
-                <p:spPr>
-                  <a:xfrm>
-                    <a:off x="1270000" y="1270000"/>
-                    <a:ext cx="1270000" cy="1270000"/>
-                  </a:xfrm>
-                  <a:prstGeom prst="rect"/>
-                </p:spPr>
-              </p:pic>
-            </p:oleObj>
-          </a:graphicData>
-        </a:graphic>
-      </p:graphicFrame>
+        </p:nvSpPr>
+        <p:spPr>
+          <a:xfrm flipH="false" flipV="false" rot="0">
+            <a:off x="588159" y="1322997"/>
+            <a:ext cx="17149491" cy="8332941"/>
+          </a:xfrm>
+          <a:custGeom>
+            <a:avLst/>
+            <a:gdLst/>
+            <a:ahLst/>
+            <a:cxnLst/>
+            <a:rect r="r" b="b" t="t" l="l"/>
+            <a:pathLst>
+              <a:path h="8332941" w="17149491">
+                <a:moveTo>
+                  <a:pt x="0" y="0"/>
+                </a:moveTo>
+                <a:lnTo>
+                  <a:pt x="17149490" y="0"/>
+                </a:lnTo>
+                <a:lnTo>
+                  <a:pt x="17149490" y="8332941"/>
+                </a:lnTo>
+                <a:lnTo>
+                  <a:pt x="0" y="8332941"/>
+                </a:lnTo>
+                <a:lnTo>
+                  <a:pt x="0" y="0"/>
+                </a:lnTo>
+                <a:close/>
+              </a:path>
+            </a:pathLst>
+          </a:custGeom>
+          <a:blipFill>
+            <a:blip r:embed="rId2"/>
+            <a:stretch>
+              <a:fillRect l="0" t="0" r="0" b="0"/>
+            </a:stretch>
+          </a:blipFill>
+        </p:spPr>
+      </p:sp>
       <p:sp>
         <p:nvSpPr>
           <p:cNvPr name="TextBox 3" id="3"/>
